--- a/Roadmap_Tesi.pptx
+++ b/Roadmap_Tesi.pptx
@@ -5,7 +5,7 @@
     <p:sldMasterId id="2147483648" r:id="rId4"/>
   </p:sldMasterIdLst>
   <p:notesMasterIdLst>
-    <p:notesMasterId r:id="rId22"/>
+    <p:notesMasterId r:id="rId23"/>
   </p:notesMasterIdLst>
   <p:sldIdLst>
     <p:sldId id="257" r:id="rId5"/>
@@ -24,7 +24,8 @@
     <p:sldId id="324" r:id="rId18"/>
     <p:sldId id="325" r:id="rId19"/>
     <p:sldId id="326" r:id="rId20"/>
-    <p:sldId id="314" r:id="rId21"/>
+    <p:sldId id="327" r:id="rId21"/>
+    <p:sldId id="314" r:id="rId22"/>
   </p:sldIdLst>
   <p:sldSz cx="12192000" cy="6858000"/>
   <p:notesSz cx="6858000" cy="9144000"/>
@@ -145,7 +146,7 @@
 <file path=ppt/charts/chart1.xml><?xml version="1.0" encoding="utf-8"?>
 <c:chartSpace xmlns:c="http://schemas.openxmlformats.org/drawingml/2006/chart" xmlns:a="http://schemas.openxmlformats.org/drawingml/2006/main" xmlns:r="http://schemas.openxmlformats.org/officeDocument/2006/relationships" xmlns:c16r2="http://schemas.microsoft.com/office/drawing/2015/06/chart">
   <c:date1904 val="0"/>
-  <c:lang val="en-GB"/>
+  <c:lang val="en-US"/>
   <c:roundedCorners val="0"/>
   <mc:AlternateContent xmlns:mc="http://schemas.openxmlformats.org/markup-compatibility/2006">
     <mc:Choice xmlns:c14="http://schemas.microsoft.com/office/drawing/2007/8/2/chart" Requires="c14">
@@ -601,6 +602,7 @@
     </c:legend>
     <c:plotVisOnly val="1"/>
     <c:dispBlanksAs val="gap"/>
+    <c:showDLblsOverMax val="0"/>
     <c:extLst>
       <c:ext xmlns:c16r3="http://schemas.microsoft.com/office/drawing/2017/03/chart" uri="{56B9EC1D-385E-4148-901F-78D8002777C0}">
         <c16r3:dataDisplayOptions16>
@@ -608,7 +610,6 @@
         </c16r3:dataDisplayOptions16>
       </c:ext>
     </c:extLst>
-    <c:showDLblsOverMax val="0"/>
   </c:chart>
   <c:spPr>
     <a:noFill/>
@@ -1260,7 +1261,7 @@
           <a:p>
             <a:fld id="{8DC85F60-0429-014B-94F4-5F04CDE84950}" type="datetimeFigureOut">
               <a:rPr lang="it-IT" smtClean="0"/>
-              <a:t>21/06/25</a:t>
+              <a:t>12/09/25</a:t>
             </a:fld>
             <a:endParaRPr lang="it-IT"/>
           </a:p>
@@ -12508,6 +12509,12 @@
           <a:bodyPr/>
           <a:lstStyle/>
           <a:p>
+            <a:r>
+              <a:rPr lang="it-IT" dirty="0"/>
+              <a:t>Fallimento</a:t>
+            </a:r>
+          </a:p>
+          <a:p>
             <a:endParaRPr lang="en-IT"/>
           </a:p>
         </p:txBody>
@@ -12526,6 +12533,168 @@
 </file>
 
 <file path=ppt/slides/slide17.xml><?xml version="1.0" encoding="utf-8"?>
+<p:sld xmlns:a="http://schemas.openxmlformats.org/drawingml/2006/main" xmlns:r="http://schemas.openxmlformats.org/officeDocument/2006/relationships" xmlns:p="http://schemas.openxmlformats.org/presentationml/2006/main">
+  <p:cSld>
+    <p:spTree>
+      <p:nvGrpSpPr>
+        <p:cNvPr id="1" name=""/>
+        <p:cNvGrpSpPr/>
+        <p:nvPr/>
+      </p:nvGrpSpPr>
+      <p:grpSpPr>
+        <a:xfrm>
+          <a:off x="0" y="0"/>
+          <a:ext cx="0" cy="0"/>
+          <a:chOff x="0" y="0"/>
+          <a:chExt cx="0" cy="0"/>
+        </a:xfrm>
+      </p:grpSpPr>
+      <p:sp>
+        <p:nvSpPr>
+          <p:cNvPr id="2" name="Title 1">
+            <a:extLst>
+              <a:ext uri="{FF2B5EF4-FFF2-40B4-BE49-F238E27FC236}">
+                <a16:creationId xmlns:a16="http://schemas.microsoft.com/office/drawing/2014/main" id="{AC340189-A054-4A26-E547-8B002B6E9E2D}"/>
+              </a:ext>
+            </a:extLst>
+          </p:cNvPr>
+          <p:cNvSpPr>
+            <a:spLocks noGrp="1"/>
+          </p:cNvSpPr>
+          <p:nvPr>
+            <p:ph type="title"/>
+          </p:nvPr>
+        </p:nvSpPr>
+        <p:spPr/>
+        <p:txBody>
+          <a:bodyPr/>
+          <a:lstStyle/>
+          <a:p>
+            <a:r>
+              <a:rPr lang="en-US" dirty="0"/>
+              <a:t>Mmdetection3d: framework python</a:t>
+            </a:r>
+          </a:p>
+        </p:txBody>
+      </p:sp>
+      <p:sp>
+        <p:nvSpPr>
+          <p:cNvPr id="3" name="Content Placeholder 2">
+            <a:extLst>
+              <a:ext uri="{FF2B5EF4-FFF2-40B4-BE49-F238E27FC236}">
+                <a16:creationId xmlns:a16="http://schemas.microsoft.com/office/drawing/2014/main" id="{373BB5B2-DF1E-E3DE-5C74-BBC322BBCB54}"/>
+              </a:ext>
+            </a:extLst>
+          </p:cNvPr>
+          <p:cNvSpPr>
+            <a:spLocks noGrp="1"/>
+          </p:cNvSpPr>
+          <p:nvPr>
+            <p:ph idx="1"/>
+          </p:nvPr>
+        </p:nvSpPr>
+        <p:spPr/>
+        <p:txBody>
+          <a:bodyPr/>
+          <a:lstStyle/>
+          <a:p>
+            <a:r>
+              <a:rPr lang="en-US" dirty="0"/>
+              <a:t>- </a:t>
+            </a:r>
+            <a:r>
+              <a:rPr lang="en-US" dirty="0" err="1"/>
+              <a:t>Installazione</a:t>
+            </a:r>
+            <a:r>
+              <a:rPr lang="en-US" dirty="0"/>
+              <a:t>, test, workflow </a:t>
+            </a:r>
+            <a:r>
+              <a:rPr lang="en-US" dirty="0" err="1"/>
+              <a:t>compatto</a:t>
+            </a:r>
+            <a:endParaRPr lang="en-US" dirty="0"/>
+          </a:p>
+          <a:p>
+            <a:r>
+              <a:rPr lang="en-US" dirty="0"/>
+              <a:t>- </a:t>
+            </a:r>
+            <a:r>
+              <a:rPr lang="en-US" dirty="0" err="1"/>
+              <a:t>Analisi</a:t>
+            </a:r>
+            <a:r>
+              <a:rPr lang="en-US" dirty="0"/>
+              <a:t> </a:t>
+            </a:r>
+            <a:r>
+              <a:rPr lang="en-US" dirty="0" err="1"/>
+              <a:t>dei</a:t>
+            </a:r>
+            <a:r>
+              <a:rPr lang="en-US" dirty="0"/>
+              <a:t> </a:t>
+            </a:r>
+            <a:r>
+              <a:rPr lang="en-US" dirty="0" err="1"/>
+              <a:t>modelli</a:t>
+            </a:r>
+            <a:r>
+              <a:rPr lang="en-US" dirty="0"/>
+              <a:t> </a:t>
+            </a:r>
+            <a:r>
+              <a:rPr lang="en-US" dirty="0" err="1"/>
+              <a:t>presenti</a:t>
+            </a:r>
+            <a:r>
+              <a:rPr lang="en-US" dirty="0"/>
+              <a:t>: backbone </a:t>
+            </a:r>
+            <a:r>
+              <a:rPr lang="en-US" dirty="0" err="1"/>
+              <a:t>utilizzato</a:t>
+            </a:r>
+            <a:r>
+              <a:rPr lang="en-US" dirty="0"/>
+              <a:t>, load interval, dataset </a:t>
+            </a:r>
+            <a:r>
+              <a:rPr lang="en-US" dirty="0" err="1"/>
+              <a:t>utilizzato</a:t>
+            </a:r>
+            <a:r>
+              <a:rPr lang="en-US" dirty="0"/>
+              <a:t>, </a:t>
+            </a:r>
+            <a:r>
+              <a:rPr lang="en-US" dirty="0" err="1"/>
+              <a:t>mAP</a:t>
+            </a:r>
+            <a:r>
+              <a:rPr lang="en-US"/>
+              <a:t>,…</a:t>
+            </a:r>
+            <a:endParaRPr lang="en-US" dirty="0"/>
+          </a:p>
+        </p:txBody>
+      </p:sp>
+    </p:spTree>
+    <p:extLst>
+      <p:ext uri="{BB962C8B-B14F-4D97-AF65-F5344CB8AC3E}">
+        <p14:creationId xmlns:p14="http://schemas.microsoft.com/office/powerpoint/2010/main" val="3958569503"/>
+      </p:ext>
+    </p:extLst>
+  </p:cSld>
+  <p:clrMapOvr>
+    <a:masterClrMapping/>
+  </p:clrMapOvr>
+</p:sld>
+</file>
+
+<file path=ppt/slides/slide18.xml><?xml version="1.0" encoding="utf-8"?>
 <p:sld xmlns:a="http://schemas.openxmlformats.org/drawingml/2006/main" xmlns:r="http://schemas.openxmlformats.org/officeDocument/2006/relationships" xmlns:p="http://schemas.openxmlformats.org/presentationml/2006/main">
   <p:cSld>
     <p:spTree>
@@ -14779,18 +14948,18 @@
 </file>
 
 <file path=customXml/item1.xml><?xml version="1.0" encoding="utf-8"?>
+<p:properties xmlns:p="http://schemas.microsoft.com/office/2006/metadata/properties" xmlns:xsi="http://www.w3.org/2001/XMLSchema-instance" xmlns:pc="http://schemas.microsoft.com/office/infopath/2007/PartnerControls">
+  <documentManagement/>
+</p:properties>
+</file>
+
+<file path=customXml/item2.xml><?xml version="1.0" encoding="utf-8"?>
 <?mso-contentType ?>
 <FormTemplates xmlns="http://schemas.microsoft.com/sharepoint/v3/contenttype/forms">
   <Display>DocumentLibraryForm</Display>
   <Edit>DocumentLibraryForm</Edit>
   <New>DocumentLibraryForm</New>
 </FormTemplates>
-</file>
-
-<file path=customXml/item2.xml><?xml version="1.0" encoding="utf-8"?>
-<p:properties xmlns:p="http://schemas.microsoft.com/office/2006/metadata/properties" xmlns:xsi="http://www.w3.org/2001/XMLSchema-instance" xmlns:pc="http://schemas.microsoft.com/office/infopath/2007/PartnerControls">
-  <documentManagement/>
-</p:properties>
 </file>
 
 <file path=customXml/item3.xml><?xml version="1.0" encoding="utf-8"?>
@@ -14908,18 +15077,18 @@
 </file>
 
 <file path=customXml/itemProps1.xml><?xml version="1.0" encoding="utf-8"?>
-<ds:datastoreItem xmlns:ds="http://schemas.openxmlformats.org/officeDocument/2006/customXml" ds:itemID="{4BC16365-F120-405E-BC21-08A6EC07CCAB}">
+<ds:datastoreItem xmlns:ds="http://schemas.openxmlformats.org/officeDocument/2006/customXml" ds:itemID="{A12E596D-799B-4DD9-8325-1BBF4D0C1A66}">
   <ds:schemaRefs>
-    <ds:schemaRef ds:uri="http://schemas.microsoft.com/sharepoint/v3/contenttype/forms"/>
+    <ds:schemaRef ds:uri="http://schemas.microsoft.com/office/2006/metadata/properties"/>
+    <ds:schemaRef ds:uri="http://schemas.microsoft.com/office/infopath/2007/PartnerControls"/>
   </ds:schemaRefs>
 </ds:datastoreItem>
 </file>
 
 <file path=customXml/itemProps2.xml><?xml version="1.0" encoding="utf-8"?>
-<ds:datastoreItem xmlns:ds="http://schemas.openxmlformats.org/officeDocument/2006/customXml" ds:itemID="{A12E596D-799B-4DD9-8325-1BBF4D0C1A66}">
+<ds:datastoreItem xmlns:ds="http://schemas.openxmlformats.org/officeDocument/2006/customXml" ds:itemID="{4BC16365-F120-405E-BC21-08A6EC07CCAB}">
   <ds:schemaRefs>
-    <ds:schemaRef ds:uri="http://schemas.microsoft.com/office/2006/metadata/properties"/>
-    <ds:schemaRef ds:uri="http://schemas.microsoft.com/office/infopath/2007/PartnerControls"/>
+    <ds:schemaRef ds:uri="http://schemas.microsoft.com/sharepoint/v3/contenttype/forms"/>
   </ds:schemaRefs>
 </ds:datastoreItem>
 </file>
